--- a/docs/informativa/outputs/2026-06-19/deck_informativa_2026-06-19.pptx
+++ b/docs/informativa/outputs/2026-06-19/deck_informativa_2026-06-19.pptx
@@ -4053,7 +4053,7 @@
                   <a:srgbClr val="1A3A5C"/>
                 </a:solidFill>
               </a:rPr>
-              <a:t>Por qué usamos un modelo combinado en vez de elegir una sola fuente: al juntar lo que dice el mercado de futuros con la regla de la tasa de equilibrio (Taylor), el modelo combinado acierta más. En los últimos 15 años solo 7 de cada 100 meses fue la peor predicción, mientras que el mercado solo lo fue 12 veces y la regla de Taylor sola 82. En la mayoría de los meses (93%) el modelo combinado fue mejor que la peor de las dos fuentes por separado.</a:t>
+              <a:t>Por qué combinamos: el mercado de futuros solo es la predicción más certera en el 66% de los meses, con error típico de 7 centésimas. Pero cuando se equivoca tiende a hacerlo fuerte: es la peor el 12% del tiempo. La regla de Taylor sola es aún más volátil (82% peor). El modelo combinado sacrifica algo de frecuencia de acierto (gana solo el 28%, error típico 11) a cambio de robustez: casi nunca es catastrófico, solo el 7% es la peor. En decisiones de inversión, esta robustez importa más que ganarle al mercado cada mes.</a:t>
             </a:r>
           </a:p>
         </p:txBody>
